--- a/classes/parte-16-capstones-y-preparacion-de-certificaciones/305-capstone-operacion-red-team-end-to-end/clase-305-presentacion.pptx
+++ b/classes/parte-16-capstones-y-preparacion-de-certificaciones/305-capstone-operacion-red-team-end-to-end/clase-305-presentacion.pptx
@@ -17,6 +17,10 @@
     <p:sldId id="265" r:id="rId16"/>
     <p:sldId id="266" r:id="rId17"/>
     <p:sldId id="267" r:id="rId18"/>
+    <p:sldId id="268" r:id="rId19"/>
+    <p:sldId id="269" r:id="rId20"/>
+    <p:sldId id="270" r:id="rId21"/>
+    <p:sldId id="271" r:id="rId22"/>
   </p:sldIdLst>
   <p:sldSz cx="9144000" cy="6858000" type="screen4x3"/>
   <p:notesSz cx="6858000" cy="9144000"/>
@@ -3198,7 +3202,7 @@
                   <a:srgbClr val="0B3D2E"/>
                 </a:solidFill>
               </a:rPr>
-              <a:t>⚠️ Errores comunes</a:t>
+              <a:t>🧪 Laboratorio guiado</a:t>
             </a:r>
           </a:p>
         </p:txBody>
@@ -3236,67 +3240,97 @@
                   <a:srgbClr val="22282E"/>
                 </a:solidFill>
               </a:rPr>
-              <a:t>•  "El implante no llama a casa" — Redirector mal configurado; revisa el reenvío y el perfil C2.</a:t>
-            </a:r>
-          </a:p>
-          <a:p>
-            <a:pPr>
-              <a:spcAft>
-                <a:spcPts val="600"/>
-              </a:spcAft>
-            </a:pPr>
-            <a:r>
-              <a:rPr sz="1500">
-                <a:solidFill>
-                  <a:srgbClr val="22282E"/>
-                </a:solidFill>
-              </a:rPr>
-              <a:t>•  "Me detecta el EDR al instante" — OPSEC pobre; ajusta sleep/jitter y evita binarios conocidos.</a:t>
-            </a:r>
-          </a:p>
-          <a:p>
-            <a:pPr>
-              <a:spcAft>
-                <a:spcPts val="600"/>
-              </a:spcAft>
-            </a:pPr>
-            <a:r>
-              <a:rPr sz="1500">
-                <a:solidFill>
-                  <a:srgbClr val="22282E"/>
-                </a:solidFill>
-              </a:rPr>
-              <a:t>•  "No sé qué técnicas usé" — Sin registro; marca cada acción en ATT&amp;CK Navigator en el momento.</a:t>
-            </a:r>
-          </a:p>
-          <a:p>
-            <a:pPr>
-              <a:spcAft>
-                <a:spcPts val="600"/>
-              </a:spcAft>
-            </a:pPr>
-            <a:r>
-              <a:rPr sz="1500">
-                <a:solidFill>
-                  <a:srgbClr val="22282E"/>
-                </a:solidFill>
-              </a:rPr>
-              <a:t>•  "El informe solo cuenta el hackeo" — Falta valor defensivo; añade recomendaciones de detección.</a:t>
-            </a:r>
-          </a:p>
-          <a:p>
-            <a:pPr>
-              <a:spcAft>
-                <a:spcPts val="600"/>
-              </a:spcAft>
-            </a:pPr>
-            <a:r>
-              <a:rPr sz="1500">
-                <a:solidFill>
-                  <a:srgbClr val="22282E"/>
-                </a:solidFill>
-              </a:rPr>
-              <a:t>•  "Rompí el dominio" — Acciones destructivas; usa snapshots y evita persistencia dañina.</a:t>
+              <a:t>•  Define el escenario. Elige un adversario a emular y su conjunto de TTP en ATT&amp;CK Navigator; fija el objetivo ("comprometer el controlador de dominio y exfiltrar secret.docx").</a:t>
+            </a:r>
+          </a:p>
+          <a:p>
+            <a:pPr>
+              <a:spcAft>
+                <a:spcPts val="600"/>
+              </a:spcAft>
+            </a:pPr>
+            <a:r>
+              <a:rPr sz="1500">
+                <a:solidFill>
+                  <a:srgbClr val="22282E"/>
+                </a:solidFill>
+              </a:rPr>
+              <a:t>•  Despliega C2. Levanta tu servidor (Sliver/Mythic) en una VM y un redirector Nginx delante; verifica el callback.</a:t>
+            </a:r>
+          </a:p>
+          <a:p>
+            <a:pPr>
+              <a:spcAft>
+                <a:spcPts val="600"/>
+              </a:spcAft>
+            </a:pPr>
+            <a:r>
+              <a:rPr sz="1500">
+                <a:solidFill>
+                  <a:srgbClr val="22282E"/>
+                </a:solidFill>
+              </a:rPr>
+              <a:t>•  Acceso inicial. Genera un payload y simula su entrega (en tu laboratorio, sin víctimas reales); obtén el primer implante.</a:t>
+            </a:r>
+          </a:p>
+          <a:p>
+            <a:pPr>
+              <a:spcAft>
+                <a:spcPts val="600"/>
+              </a:spcAft>
+            </a:pPr>
+            <a:r>
+              <a:rPr sz="1500">
+                <a:solidFill>
+                  <a:srgbClr val="22282E"/>
+                </a:solidFill>
+              </a:rPr>
+              <a:t>•  Descubrimiento. Enumera el host y el dominio (whoami /all, BloodHound) respetando OPSEC.</a:t>
+            </a:r>
+          </a:p>
+          <a:p>
+            <a:pPr>
+              <a:spcAft>
+                <a:spcPts val="600"/>
+              </a:spcAft>
+            </a:pPr>
+            <a:r>
+              <a:rPr sz="1500">
+                <a:solidFill>
+                  <a:srgbClr val="22282E"/>
+                </a:solidFill>
+              </a:rPr>
+              <a:t>•  Escalada y credenciales. Abusa de una debilidad local; extrae credenciales con técnica coherente con el escenario.</a:t>
+            </a:r>
+          </a:p>
+          <a:p>
+            <a:pPr>
+              <a:spcAft>
+                <a:spcPts val="600"/>
+              </a:spcAft>
+            </a:pPr>
+            <a:r>
+              <a:rPr sz="1500">
+                <a:solidFill>
+                  <a:srgbClr val="22282E"/>
+                </a:solidFill>
+              </a:rPr>
+              <a:t>•  Movimiento lateral. Pivota a otros hosts; documenta cada salto y su técnica ATT&amp;CK.</a:t>
+            </a:r>
+          </a:p>
+          <a:p>
+            <a:pPr>
+              <a:spcAft>
+                <a:spcPts val="600"/>
+              </a:spcAft>
+            </a:pPr>
+            <a:r>
+              <a:rPr sz="1500">
+                <a:solidFill>
+                  <a:srgbClr val="22282E"/>
+                </a:solidFill>
+              </a:rPr>
+              <a:t>•  Evasión. Si hay EDR, ajusta el implante (sleep/jitter, ofuscación) y anota qué evadiste y qué te detectó.</a:t>
             </a:r>
           </a:p>
         </p:txBody>
@@ -3347,7 +3381,7 @@
                   <a:srgbClr val="0B3D2E"/>
                 </a:solidFill>
               </a:rPr>
-              <a:t>❓ Preguntas frecuentes</a:t>
+              <a:t>✍️ Ejercicios</a:t>
             </a:r>
           </a:p>
         </p:txBody>
@@ -3385,97 +3419,82 @@
                   <a:srgbClr val="22282E"/>
                 </a:solidFill>
               </a:rPr>
-              <a:t>•  ❓ ¿Red Team es lo mismo que pentest?</a:t>
-            </a:r>
-          </a:p>
-          <a:p>
-            <a:pPr>
-              <a:spcAft>
-                <a:spcPts val="600"/>
-              </a:spcAft>
-            </a:pPr>
-            <a:r>
-              <a:rPr sz="1500">
-                <a:solidFill>
-                  <a:srgbClr val="22282E"/>
-                </a:solidFill>
-              </a:rPr>
-              <a:t>•  No. El pentest busca cobertura de vulnerabilidades; el Red Team emula un adversario con objetivos y sigilo, y mide la detección.</a:t>
-            </a:r>
-          </a:p>
-          <a:p>
-            <a:pPr>
-              <a:spcAft>
-                <a:spcPts val="600"/>
-              </a:spcAft>
-            </a:pPr>
-            <a:r>
-              <a:rPr sz="1500">
-                <a:solidFill>
-                  <a:srgbClr val="22282E"/>
-                </a:solidFill>
-              </a:rPr>
-              <a:t>•  ❓ ¿Qué framework C2 uso para aprender?</a:t>
-            </a:r>
-          </a:p>
-          <a:p>
-            <a:pPr>
-              <a:spcAft>
-                <a:spcPts val="600"/>
-              </a:spcAft>
-            </a:pPr>
-            <a:r>
-              <a:rPr sz="1500">
-                <a:solidFill>
-                  <a:srgbClr val="22282E"/>
-                </a:solidFill>
-              </a:rPr>
-              <a:t>•  Sliver o Mythic son abiertos y bien documentados. Úsalos solo en laboratorio.</a:t>
-            </a:r>
-          </a:p>
-          <a:p>
-            <a:pPr>
-              <a:spcAft>
-                <a:spcPts val="600"/>
-              </a:spcAft>
-            </a:pPr>
-            <a:r>
-              <a:rPr sz="1500">
-                <a:solidFill>
-                  <a:srgbClr val="22282E"/>
-                </a:solidFill>
-              </a:rPr>
-              <a:t>•  ❓ ¿Necesito un EDR real?</a:t>
-            </a:r>
-          </a:p>
-          <a:p>
-            <a:pPr>
-              <a:spcAft>
-                <a:spcPts val="600"/>
-              </a:spcAft>
-            </a:pPr>
-            <a:r>
-              <a:rPr sz="1500">
-                <a:solidFill>
-                  <a:srgbClr val="22282E"/>
-                </a:solidFill>
-              </a:rPr>
-              <a:t>•  Ayuda, pero puedes practicar OPSEC y detección con las herramientas de la Parte 10–11 sin uno comercial.</a:t>
-            </a:r>
-          </a:p>
-          <a:p>
-            <a:pPr>
-              <a:spcAft>
-                <a:spcPts val="600"/>
-              </a:spcAft>
-            </a:pPr>
-            <a:r>
-              <a:rPr sz="1500">
-                <a:solidFill>
-                  <a:srgbClr val="22282E"/>
-                </a:solidFill>
-              </a:rPr>
-              <a:t>•  ❓ ¿Cómo conecto esto con el Blue Team?</a:t>
+              <a:t>•  Construye la capa ATT&amp;CK Navigator del adversario emulado.</a:t>
+            </a:r>
+          </a:p>
+          <a:p>
+            <a:pPr>
+              <a:spcAft>
+                <a:spcPts val="600"/>
+              </a:spcAft>
+            </a:pPr>
+            <a:r>
+              <a:rPr sz="1500">
+                <a:solidFill>
+                  <a:srgbClr val="22282E"/>
+                </a:solidFill>
+              </a:rPr>
+              <a:t>•  Diseña el diagrama de tu infraestructura C2 con redirector.</a:t>
+            </a:r>
+          </a:p>
+          <a:p>
+            <a:pPr>
+              <a:spcAft>
+                <a:spcPts val="600"/>
+              </a:spcAft>
+            </a:pPr>
+            <a:r>
+              <a:rPr sz="1500">
+                <a:solidFill>
+                  <a:srgbClr val="22282E"/>
+                </a:solidFill>
+              </a:rPr>
+              <a:t>•  Documenta una cadena acceso inicial → Domain Admin con técnicas ATT&amp;CK por paso.</a:t>
+            </a:r>
+          </a:p>
+          <a:p>
+            <a:pPr>
+              <a:spcAft>
+                <a:spcPts val="600"/>
+              </a:spcAft>
+            </a:pPr>
+            <a:r>
+              <a:rPr sz="1500">
+                <a:solidFill>
+                  <a:srgbClr val="22282E"/>
+                </a:solidFill>
+              </a:rPr>
+              <a:t>•  Compara dos configuraciones de C2 (sleep/jitter) y su impacto en OPSEC.</a:t>
+            </a:r>
+          </a:p>
+          <a:p>
+            <a:pPr>
+              <a:spcAft>
+                <a:spcPts val="600"/>
+              </a:spcAft>
+            </a:pPr>
+            <a:r>
+              <a:rPr sz="1500">
+                <a:solidFill>
+                  <a:srgbClr val="22282E"/>
+                </a:solidFill>
+              </a:rPr>
+              <a:t>•  Enumera 5 técnicas que un EDR debería detectar y por qué.</a:t>
+            </a:r>
+          </a:p>
+          <a:p>
+            <a:pPr>
+              <a:spcAft>
+                <a:spcPts val="600"/>
+              </a:spcAft>
+            </a:pPr>
+            <a:r>
+              <a:rPr sz="1500">
+                <a:solidFill>
+                  <a:srgbClr val="22282E"/>
+                </a:solidFill>
+              </a:rPr>
+              <a:t>•  Escribe la narrativa de ataque para el resumen ejecutivo.</a:t>
             </a:r>
           </a:p>
         </p:txBody>
@@ -3526,7 +3545,7 @@
                   <a:srgbClr val="0B3D2E"/>
                 </a:solidFill>
               </a:rPr>
-              <a:t>🔗 Referencias</a:t>
+              <a:t>📝 Reto verificable</a:t>
             </a:r>
           </a:p>
         </p:txBody>
@@ -3564,6 +3583,438 @@
                   <a:srgbClr val="22282E"/>
                 </a:solidFill>
               </a:rPr>
+              <a:t>•  Entrega un informe de operación Red Team (informe-redteam.md) con: escenario y objetivos, diagrama de infraestructura C2, narrativa de ataque paso a paso mapeada a ATT&amp;CK, técnicas de evasión…</a:t>
+            </a:r>
+          </a:p>
+          <a:p>
+            <a:pPr>
+              <a:spcAft>
+                <a:spcPts val="600"/>
+              </a:spcAft>
+            </a:pPr>
+            <a:r>
+              <a:rPr sz="1500">
+                <a:solidFill>
+                  <a:srgbClr val="22282E"/>
+                </a:solidFill>
+              </a:rPr>
+              <a:t>•  Criterio de aceptación: la operación alcanza el objetivo definido, cada paso tiene su técnica ATT&amp;CK, la infraestructura incluye al menos un redirector, y el informe entrega recomendaciones de…</a:t>
+            </a:r>
+          </a:p>
+        </p:txBody>
+      </p:sp>
+    </p:spTree>
+  </p:cSld>
+  <p:clrMapOvr>
+    <a:masterClrMapping/>
+  </p:clrMapOvr>
+</p:sld>
+</file>
+
+<file path=ppt/slides/slide13.xml><?xml version="1.0" encoding="utf-8"?>
+<p:sld xmlns:a="http://schemas.openxmlformats.org/drawingml/2006/main" xmlns:p="http://schemas.openxmlformats.org/presentationml/2006/main" xmlns:r="http://schemas.openxmlformats.org/officeDocument/2006/relationships">
+  <p:cSld>
+    <p:spTree>
+      <p:nvGrpSpPr>
+        <p:cNvPr id="1" name=""/>
+        <p:cNvGrpSpPr/>
+        <p:nvPr/>
+      </p:nvGrpSpPr>
+      <p:grpSpPr/>
+      <p:sp>
+        <p:nvSpPr>
+          <p:cNvPr id="2" name="TextBox 1"/>
+          <p:cNvSpPr txBox="1"/>
+          <p:nvPr/>
+        </p:nvSpPr>
+        <p:spPr>
+          <a:xfrm>
+            <a:off x="457200" y="320040"/>
+            <a:ext cx="8229600" cy="822960"/>
+          </a:xfrm>
+          <a:prstGeom prst="rect">
+            <a:avLst/>
+          </a:prstGeom>
+          <a:noFill/>
+        </p:spPr>
+        <p:txBody>
+          <a:bodyPr wrap="square">
+            <a:spAutoFit/>
+          </a:bodyPr>
+          <a:lstStyle/>
+          <a:p>
+            <a:r>
+              <a:rPr sz="2600" b="1">
+                <a:solidFill>
+                  <a:srgbClr val="0B3D2E"/>
+                </a:solidFill>
+              </a:rPr>
+              <a:t>⚠️ Errores comunes</a:t>
+            </a:r>
+          </a:p>
+        </p:txBody>
+      </p:sp>
+      <p:sp>
+        <p:nvSpPr>
+          <p:cNvPr id="3" name="TextBox 2"/>
+          <p:cNvSpPr txBox="1"/>
+          <p:nvPr/>
+        </p:nvSpPr>
+        <p:spPr>
+          <a:xfrm>
+            <a:off x="457200" y="1280160"/>
+            <a:ext cx="8229600" cy="4937760"/>
+          </a:xfrm>
+          <a:prstGeom prst="rect">
+            <a:avLst/>
+          </a:prstGeom>
+          <a:noFill/>
+        </p:spPr>
+        <p:txBody>
+          <a:bodyPr wrap="square">
+            <a:spAutoFit/>
+          </a:bodyPr>
+          <a:lstStyle/>
+          <a:p>
+            <a:pPr>
+              <a:spcAft>
+                <a:spcPts val="600"/>
+              </a:spcAft>
+            </a:pPr>
+            <a:r>
+              <a:rPr sz="1500">
+                <a:solidFill>
+                  <a:srgbClr val="22282E"/>
+                </a:solidFill>
+              </a:rPr>
+              <a:t>•  "El implante no llama a casa" — Redirector mal configurado; revisa el reenvío y el perfil C2.</a:t>
+            </a:r>
+          </a:p>
+          <a:p>
+            <a:pPr>
+              <a:spcAft>
+                <a:spcPts val="600"/>
+              </a:spcAft>
+            </a:pPr>
+            <a:r>
+              <a:rPr sz="1500">
+                <a:solidFill>
+                  <a:srgbClr val="22282E"/>
+                </a:solidFill>
+              </a:rPr>
+              <a:t>•  "Me detecta el EDR al instante" — OPSEC pobre; ajusta sleep/jitter y evita binarios conocidos.</a:t>
+            </a:r>
+          </a:p>
+          <a:p>
+            <a:pPr>
+              <a:spcAft>
+                <a:spcPts val="600"/>
+              </a:spcAft>
+            </a:pPr>
+            <a:r>
+              <a:rPr sz="1500">
+                <a:solidFill>
+                  <a:srgbClr val="22282E"/>
+                </a:solidFill>
+              </a:rPr>
+              <a:t>•  "No sé qué técnicas usé" — Sin registro; marca cada acción en ATT&amp;CK Navigator en el momento.</a:t>
+            </a:r>
+          </a:p>
+          <a:p>
+            <a:pPr>
+              <a:spcAft>
+                <a:spcPts val="600"/>
+              </a:spcAft>
+            </a:pPr>
+            <a:r>
+              <a:rPr sz="1500">
+                <a:solidFill>
+                  <a:srgbClr val="22282E"/>
+                </a:solidFill>
+              </a:rPr>
+              <a:t>•  "El informe solo cuenta el hackeo" — Falta valor defensivo; añade recomendaciones de detección.</a:t>
+            </a:r>
+          </a:p>
+          <a:p>
+            <a:pPr>
+              <a:spcAft>
+                <a:spcPts val="600"/>
+              </a:spcAft>
+            </a:pPr>
+            <a:r>
+              <a:rPr sz="1500">
+                <a:solidFill>
+                  <a:srgbClr val="22282E"/>
+                </a:solidFill>
+              </a:rPr>
+              <a:t>•  "Rompí el dominio" — Acciones destructivas; usa snapshots y evita persistencia dañina.</a:t>
+            </a:r>
+          </a:p>
+        </p:txBody>
+      </p:sp>
+    </p:spTree>
+  </p:cSld>
+  <p:clrMapOvr>
+    <a:masterClrMapping/>
+  </p:clrMapOvr>
+</p:sld>
+</file>
+
+<file path=ppt/slides/slide14.xml><?xml version="1.0" encoding="utf-8"?>
+<p:sld xmlns:a="http://schemas.openxmlformats.org/drawingml/2006/main" xmlns:p="http://schemas.openxmlformats.org/presentationml/2006/main" xmlns:r="http://schemas.openxmlformats.org/officeDocument/2006/relationships">
+  <p:cSld>
+    <p:spTree>
+      <p:nvGrpSpPr>
+        <p:cNvPr id="1" name=""/>
+        <p:cNvGrpSpPr/>
+        <p:nvPr/>
+      </p:nvGrpSpPr>
+      <p:grpSpPr/>
+      <p:sp>
+        <p:nvSpPr>
+          <p:cNvPr id="2" name="TextBox 1"/>
+          <p:cNvSpPr txBox="1"/>
+          <p:nvPr/>
+        </p:nvSpPr>
+        <p:spPr>
+          <a:xfrm>
+            <a:off x="457200" y="320040"/>
+            <a:ext cx="8229600" cy="822960"/>
+          </a:xfrm>
+          <a:prstGeom prst="rect">
+            <a:avLst/>
+          </a:prstGeom>
+          <a:noFill/>
+        </p:spPr>
+        <p:txBody>
+          <a:bodyPr wrap="square">
+            <a:spAutoFit/>
+          </a:bodyPr>
+          <a:lstStyle/>
+          <a:p>
+            <a:r>
+              <a:rPr sz="2600" b="1">
+                <a:solidFill>
+                  <a:srgbClr val="0B3D2E"/>
+                </a:solidFill>
+              </a:rPr>
+              <a:t>❓ Preguntas frecuentes</a:t>
+            </a:r>
+          </a:p>
+        </p:txBody>
+      </p:sp>
+      <p:sp>
+        <p:nvSpPr>
+          <p:cNvPr id="3" name="TextBox 2"/>
+          <p:cNvSpPr txBox="1"/>
+          <p:nvPr/>
+        </p:nvSpPr>
+        <p:spPr>
+          <a:xfrm>
+            <a:off x="457200" y="1280160"/>
+            <a:ext cx="8229600" cy="4937760"/>
+          </a:xfrm>
+          <a:prstGeom prst="rect">
+            <a:avLst/>
+          </a:prstGeom>
+          <a:noFill/>
+        </p:spPr>
+        <p:txBody>
+          <a:bodyPr wrap="square">
+            <a:spAutoFit/>
+          </a:bodyPr>
+          <a:lstStyle/>
+          <a:p>
+            <a:pPr>
+              <a:spcAft>
+                <a:spcPts val="600"/>
+              </a:spcAft>
+            </a:pPr>
+            <a:r>
+              <a:rPr sz="1500">
+                <a:solidFill>
+                  <a:srgbClr val="22282E"/>
+                </a:solidFill>
+              </a:rPr>
+              <a:t>•  ❓ ¿Red Team es lo mismo que pentest?</a:t>
+            </a:r>
+          </a:p>
+          <a:p>
+            <a:pPr>
+              <a:spcAft>
+                <a:spcPts val="600"/>
+              </a:spcAft>
+            </a:pPr>
+            <a:r>
+              <a:rPr sz="1500">
+                <a:solidFill>
+                  <a:srgbClr val="22282E"/>
+                </a:solidFill>
+              </a:rPr>
+              <a:t>•  No. El pentest busca cobertura de vulnerabilidades; el Red Team emula un adversario con objetivos y sigilo, y mide la detección.</a:t>
+            </a:r>
+          </a:p>
+          <a:p>
+            <a:pPr>
+              <a:spcAft>
+                <a:spcPts val="600"/>
+              </a:spcAft>
+            </a:pPr>
+            <a:r>
+              <a:rPr sz="1500">
+                <a:solidFill>
+                  <a:srgbClr val="22282E"/>
+                </a:solidFill>
+              </a:rPr>
+              <a:t>•  ❓ ¿Qué framework C2 uso para aprender?</a:t>
+            </a:r>
+          </a:p>
+          <a:p>
+            <a:pPr>
+              <a:spcAft>
+                <a:spcPts val="600"/>
+              </a:spcAft>
+            </a:pPr>
+            <a:r>
+              <a:rPr sz="1500">
+                <a:solidFill>
+                  <a:srgbClr val="22282E"/>
+                </a:solidFill>
+              </a:rPr>
+              <a:t>•  Sliver o Mythic son abiertos y bien documentados. Úsalos solo en laboratorio.</a:t>
+            </a:r>
+          </a:p>
+          <a:p>
+            <a:pPr>
+              <a:spcAft>
+                <a:spcPts val="600"/>
+              </a:spcAft>
+            </a:pPr>
+            <a:r>
+              <a:rPr sz="1500">
+                <a:solidFill>
+                  <a:srgbClr val="22282E"/>
+                </a:solidFill>
+              </a:rPr>
+              <a:t>•  ❓ ¿Necesito un EDR real?</a:t>
+            </a:r>
+          </a:p>
+          <a:p>
+            <a:pPr>
+              <a:spcAft>
+                <a:spcPts val="600"/>
+              </a:spcAft>
+            </a:pPr>
+            <a:r>
+              <a:rPr sz="1500">
+                <a:solidFill>
+                  <a:srgbClr val="22282E"/>
+                </a:solidFill>
+              </a:rPr>
+              <a:t>•  Ayuda, pero puedes practicar OPSEC y detección con las herramientas de la Parte 10–11 sin uno comercial.</a:t>
+            </a:r>
+          </a:p>
+          <a:p>
+            <a:pPr>
+              <a:spcAft>
+                <a:spcPts val="600"/>
+              </a:spcAft>
+            </a:pPr>
+            <a:r>
+              <a:rPr sz="1500">
+                <a:solidFill>
+                  <a:srgbClr val="22282E"/>
+                </a:solidFill>
+              </a:rPr>
+              <a:t>•  ❓ ¿Cómo conecto esto con el Blue Team?</a:t>
+            </a:r>
+          </a:p>
+        </p:txBody>
+      </p:sp>
+    </p:spTree>
+  </p:cSld>
+  <p:clrMapOvr>
+    <a:masterClrMapping/>
+  </p:clrMapOvr>
+</p:sld>
+</file>
+
+<file path=ppt/slides/slide15.xml><?xml version="1.0" encoding="utf-8"?>
+<p:sld xmlns:a="http://schemas.openxmlformats.org/drawingml/2006/main" xmlns:p="http://schemas.openxmlformats.org/presentationml/2006/main" xmlns:r="http://schemas.openxmlformats.org/officeDocument/2006/relationships">
+  <p:cSld>
+    <p:spTree>
+      <p:nvGrpSpPr>
+        <p:cNvPr id="1" name=""/>
+        <p:cNvGrpSpPr/>
+        <p:nvPr/>
+      </p:nvGrpSpPr>
+      <p:grpSpPr/>
+      <p:sp>
+        <p:nvSpPr>
+          <p:cNvPr id="2" name="TextBox 1"/>
+          <p:cNvSpPr txBox="1"/>
+          <p:nvPr/>
+        </p:nvSpPr>
+        <p:spPr>
+          <a:xfrm>
+            <a:off x="457200" y="320040"/>
+            <a:ext cx="8229600" cy="822960"/>
+          </a:xfrm>
+          <a:prstGeom prst="rect">
+            <a:avLst/>
+          </a:prstGeom>
+          <a:noFill/>
+        </p:spPr>
+        <p:txBody>
+          <a:bodyPr wrap="square">
+            <a:spAutoFit/>
+          </a:bodyPr>
+          <a:lstStyle/>
+          <a:p>
+            <a:r>
+              <a:rPr sz="2600" b="1">
+                <a:solidFill>
+                  <a:srgbClr val="0B3D2E"/>
+                </a:solidFill>
+              </a:rPr>
+              <a:t>🔗 Referencias</a:t>
+            </a:r>
+          </a:p>
+        </p:txBody>
+      </p:sp>
+      <p:sp>
+        <p:nvSpPr>
+          <p:cNvPr id="3" name="TextBox 2"/>
+          <p:cNvSpPr txBox="1"/>
+          <p:nvPr/>
+        </p:nvSpPr>
+        <p:spPr>
+          <a:xfrm>
+            <a:off x="457200" y="1280160"/>
+            <a:ext cx="8229600" cy="4937760"/>
+          </a:xfrm>
+          <a:prstGeom prst="rect">
+            <a:avLst/>
+          </a:prstGeom>
+          <a:noFill/>
+        </p:spPr>
+        <p:txBody>
+          <a:bodyPr wrap="square">
+            <a:spAutoFit/>
+          </a:bodyPr>
+          <a:lstStyle/>
+          <a:p>
+            <a:pPr>
+              <a:spcAft>
+                <a:spcPts val="600"/>
+              </a:spcAft>
+            </a:pPr>
+            <a:r>
+              <a:rPr sz="1500">
+                <a:solidFill>
+                  <a:srgbClr val="22282E"/>
+                </a:solidFill>
+              </a:rPr>
               <a:t>•  MITRE ATT&amp;CK®: &lt;https://attack.mitre.org/&gt;</a:t>
             </a:r>
           </a:p>
@@ -3629,6 +4080,81 @@
           </a:p>
         </p:txBody>
       </p:sp>
+    </p:spTree>
+  </p:cSld>
+  <p:clrMapOvr>
+    <a:masterClrMapping/>
+  </p:clrMapOvr>
+</p:sld>
+</file>
+
+<file path=ppt/slides/slide16.xml><?xml version="1.0" encoding="utf-8"?>
+<p:sld xmlns:a="http://schemas.openxmlformats.org/drawingml/2006/main" xmlns:p="http://schemas.openxmlformats.org/presentationml/2006/main" xmlns:r="http://schemas.openxmlformats.org/officeDocument/2006/relationships">
+  <p:cSld>
+    <p:spTree>
+      <p:nvGrpSpPr>
+        <p:cNvPr id="1" name=""/>
+        <p:cNvGrpSpPr/>
+        <p:nvPr/>
+      </p:nvGrpSpPr>
+      <p:grpSpPr/>
+      <p:sp>
+        <p:nvSpPr>
+          <p:cNvPr id="2" name="TextBox 1"/>
+          <p:cNvSpPr txBox="1"/>
+          <p:nvPr/>
+        </p:nvSpPr>
+        <p:spPr>
+          <a:xfrm>
+            <a:off x="457200" y="274320"/>
+            <a:ext cx="8229600" cy="640080"/>
+          </a:xfrm>
+          <a:prstGeom prst="rect">
+            <a:avLst/>
+          </a:prstGeom>
+          <a:noFill/>
+        </p:spPr>
+        <p:txBody>
+          <a:bodyPr wrap="square">
+            <a:spAutoFit/>
+          </a:bodyPr>
+          <a:lstStyle/>
+          <a:p>
+            <a:r>
+              <a:rPr sz="2200" b="1">
+                <a:solidFill>
+                  <a:srgbClr val="0B3D2E"/>
+                </a:solidFill>
+              </a:rPr>
+              <a:t>Diagrama de la clase</a:t>
+            </a:r>
+          </a:p>
+        </p:txBody>
+      </p:sp>
+      <p:pic>
+        <p:nvPicPr>
+          <p:cNvPr id="3" name="Picture 2" descr="25aac96251a2c286.png"/>
+          <p:cNvPicPr>
+            <a:picLocks noChangeAspect="1"/>
+          </p:cNvPicPr>
+          <p:nvPr/>
+        </p:nvPicPr>
+        <p:blipFill>
+          <a:blip r:embed="rId2"/>
+          <a:stretch>
+            <a:fillRect/>
+          </a:stretch>
+        </p:blipFill>
+        <p:spPr>
+          <a:xfrm>
+            <a:off x="457200" y="3313940"/>
+            <a:ext cx="8229600" cy="870199"/>
+          </a:xfrm>
+          <a:prstGeom prst="rect">
+            <a:avLst/>
+          </a:prstGeom>
+        </p:spPr>
+      </p:pic>
     </p:spTree>
   </p:cSld>
   <p:clrMapOvr>
@@ -3713,7 +4239,7 @@
                   <a:srgbClr val="22282E"/>
                 </a:solidFill>
               </a:rPr>
-              <a:t>•  Ejecutar una operación Red Team completa contra tu laboratorio, simulando un adversario con objetivos de negocio (no solo "hackear máquinas"): reconocimiento, acceso inicial, establecimiento de C2, movimiento lateral, escalada, consecución de objetivos y evasión, todo mapeado a MITRE ATT&amp;CK. Integra la Parte 9 (Red Team/C2), la Parte 8 (AD) y la Parte 5 (evasión/OPSEC), y produce un informe orientado a mejorar la detección del Blue Team.</a:t>
+              <a:t>•  Ejecutar una operación Red Team completa contra tu laboratorio, simulando un adversario con objetivos de negocio (no solo "hackear máquinas"): reconocimiento, acceso inicial, establecimiento de C2…</a:t>
             </a:r>
           </a:p>
         </p:txBody>
@@ -4107,7 +4633,7 @@
                   <a:srgbClr val="0B3D2E"/>
                 </a:solidFill>
               </a:rPr>
-              <a:t>📖 Definiciones y características</a:t>
+              <a:t>🧠 Explicación en profundidad</a:t>
             </a:r>
           </a:p>
         </p:txBody>
@@ -4145,82 +4671,22 @@
                   <a:srgbClr val="22282E"/>
                 </a:solidFill>
               </a:rPr>
-              <a:t>•  Threat emulation: reproducir el TTP de un adversario concreto (p. ej. un grupo APT). Característica: guía qué técnicas usar.</a:t>
-            </a:r>
-          </a:p>
-          <a:p>
-            <a:pPr>
-              <a:spcAft>
-                <a:spcPts val="600"/>
-              </a:spcAft>
-            </a:pPr>
-            <a:r>
-              <a:rPr sz="1500">
-                <a:solidFill>
-                  <a:srgbClr val="22282E"/>
-                </a:solidFill>
-              </a:rPr>
-              <a:t>•  C2 (Command and Control): canal para controlar implantes. Característica: debe ser resiliente y sigiloso.</a:t>
-            </a:r>
-          </a:p>
-          <a:p>
-            <a:pPr>
-              <a:spcAft>
-                <a:spcPts val="600"/>
-              </a:spcAft>
-            </a:pPr>
-            <a:r>
-              <a:rPr sz="1500">
-                <a:solidFill>
-                  <a:srgbClr val="22282E"/>
-                </a:solidFill>
-              </a:rPr>
-              <a:t>•  Redirector: servidor intermedio que oculta el C2 real. Característica: protege la infraestructura del operador.</a:t>
-            </a:r>
-          </a:p>
-          <a:p>
-            <a:pPr>
-              <a:spcAft>
-                <a:spcPts val="600"/>
-              </a:spcAft>
-            </a:pPr>
-            <a:r>
-              <a:rPr sz="1500">
-                <a:solidFill>
-                  <a:srgbClr val="22282E"/>
-                </a:solidFill>
-              </a:rPr>
-              <a:t>•  OPSEC: disciplina para no dejar rastros atribuibles. Característica: cada acción sopesa el riesgo de detección.</a:t>
-            </a:r>
-          </a:p>
-          <a:p>
-            <a:pPr>
-              <a:spcAft>
-                <a:spcPts val="600"/>
-              </a:spcAft>
-            </a:pPr>
-            <a:r>
-              <a:rPr sz="1500">
-                <a:solidFill>
-                  <a:srgbClr val="22282E"/>
-                </a:solidFill>
-              </a:rPr>
-              <a:t>•  Movimiento lateral: pivotar entre hosts con credenciales/técnicas. Característica: base del compromiso de dominio.</a:t>
-            </a:r>
-          </a:p>
-          <a:p>
-            <a:pPr>
-              <a:spcAft>
-                <a:spcPts val="600"/>
-              </a:spcAft>
-            </a:pPr>
-            <a:r>
-              <a:rPr sz="1500">
-                <a:solidFill>
-                  <a:srgbClr val="22282E"/>
-                </a:solidFill>
-              </a:rPr>
-              <a:t>•  Purple teaming: colaboración Red/Blue para mejorar detección. Característica: cierra el ciclo del capstone.</a:t>
+              <a:t>•  Una operación red team mide objetivos y controles bajo autorización; no maximiza acceso. Emulación, telemetría, seguridad operacional y cleanup son entregables. La clase convierte el objetivo en una…</a:t>
+            </a:r>
+          </a:p>
+          <a:p>
+            <a:pPr>
+              <a:spcAft>
+                <a:spcPts val="600"/>
+              </a:spcAft>
+            </a:pPr>
+            <a:r>
+              <a:rPr sz="1500">
+                <a:solidFill>
+                  <a:srgbClr val="22282E"/>
+                </a:solidFill>
+              </a:rPr>
+              <a:t>•  El objetivo se cumple con una técnica menos invasiva. El equipo detiene escalamiento y conserva evidencia suficiente.</a:t>
             </a:r>
           </a:p>
         </p:txBody>
@@ -4271,7 +4737,7 @@
                   <a:srgbClr val="0B3D2E"/>
                 </a:solidFill>
               </a:rPr>
-              <a:t>🧰 Herramientas y preparación</a:t>
+              <a:t>📔 Glosario operativo</a:t>
             </a:r>
           </a:p>
         </p:txBody>
@@ -4309,82 +4775,52 @@
                   <a:srgbClr val="22282E"/>
                 </a:solidFill>
               </a:rPr>
-              <a:t>•  Laboratorio con AD (GOAD/DetectionLab) y, si tienes, un EDR de prueba.</a:t>
-            </a:r>
-          </a:p>
-          <a:p>
-            <a:pPr>
-              <a:spcAft>
-                <a:spcPts val="600"/>
-              </a:spcAft>
-            </a:pPr>
-            <a:r>
-              <a:rPr sz="1500">
-                <a:solidFill>
-                  <a:srgbClr val="22282E"/>
-                </a:solidFill>
-              </a:rPr>
-              <a:t>•  C2: un framework de laboratorio (p. ej. Sliver, Mythic o Havoc) — usa solo en tu red.</a:t>
-            </a:r>
-          </a:p>
-          <a:p>
-            <a:pPr>
-              <a:spcAft>
-                <a:spcPts val="600"/>
-              </a:spcAft>
-            </a:pPr>
-            <a:r>
-              <a:rPr sz="1500">
-                <a:solidFill>
-                  <a:srgbClr val="22282E"/>
-                </a:solidFill>
-              </a:rPr>
-              <a:t>•  Redirectores: Nginx o socat en una VM intermedia.</a:t>
-            </a:r>
-          </a:p>
-          <a:p>
-            <a:pPr>
-              <a:spcAft>
-                <a:spcPts val="600"/>
-              </a:spcAft>
-            </a:pPr>
-            <a:r>
-              <a:rPr sz="1500">
-                <a:solidFill>
-                  <a:srgbClr val="22282E"/>
-                </a:solidFill>
-              </a:rPr>
-              <a:t>•  Movimiento lateral: impacket, CrackMapExec, Rubeus, Certipy.</a:t>
-            </a:r>
-          </a:p>
-          <a:p>
-            <a:pPr>
-              <a:spcAft>
-                <a:spcPts val="600"/>
-              </a:spcAft>
-            </a:pPr>
-            <a:r>
-              <a:rPr sz="1500">
-                <a:solidFill>
-                  <a:srgbClr val="22282E"/>
-                </a:solidFill>
-              </a:rPr>
-              <a:t>•  Registro: matriz ATT&amp;CK Navigator para marcar técnicas ejecutadas.</a:t>
-            </a:r>
-          </a:p>
-          <a:p>
-            <a:pPr>
-              <a:spcAft>
-                <a:spcPts val="600"/>
-              </a:spcAft>
-            </a:pPr>
-            <a:r>
-              <a:rPr sz="1500">
-                <a:solidFill>
-                  <a:srgbClr val="22282E"/>
-                </a:solidFill>
-              </a:rPr>
-              <a:t>•  Plantilla de informe orientada a detección.</a:t>
+              <a:t>•  Término — Definición</a:t>
+            </a:r>
+          </a:p>
+          <a:p>
+            <a:pPr>
+              <a:spcAft>
+                <a:spcPts val="600"/>
+              </a:spcAft>
+            </a:pPr>
+            <a:r>
+              <a:rPr sz="1500">
+                <a:solidFill>
+                  <a:srgbClr val="22282E"/>
+                </a:solidFill>
+              </a:rPr>
+              <a:t>•  Deconfliction — Coordinación para distinguir ejercicio de incidente real.</a:t>
+            </a:r>
+          </a:p>
+          <a:p>
+            <a:pPr>
+              <a:spcAft>
+                <a:spcPts val="600"/>
+              </a:spcAft>
+            </a:pPr>
+            <a:r>
+              <a:rPr sz="1500">
+                <a:solidFill>
+                  <a:srgbClr val="22282E"/>
+                </a:solidFill>
+              </a:rPr>
+              <a:t>•  Evidencia — Resultado que otra persona puede revisar y relacionar con un criterio.</a:t>
+            </a:r>
+          </a:p>
+          <a:p>
+            <a:pPr>
+              <a:spcAft>
+                <a:spcPts val="600"/>
+              </a:spcAft>
+            </a:pPr>
+            <a:r>
+              <a:rPr sz="1500">
+                <a:solidFill>
+                  <a:srgbClr val="22282E"/>
+                </a:solidFill>
+              </a:rPr>
+              <a:t>•  Retrospectiva — Revisión de decisiones, límites y siguiente mejora.</a:t>
             </a:r>
           </a:p>
         </p:txBody>
@@ -4435,7 +4871,7 @@
                   <a:srgbClr val="0B3D2E"/>
                 </a:solidFill>
               </a:rPr>
-              <a:t>🧪 Laboratorio guiado</a:t>
+              <a:t>✅ Criterio de dominio</a:t>
             </a:r>
           </a:p>
         </p:txBody>
@@ -4473,97 +4909,7 @@
                   <a:srgbClr val="22282E"/>
                 </a:solidFill>
               </a:rPr>
-              <a:t>•  Define el escenario. Elige un adversario a emular y su conjunto de TTP en ATT&amp;CK Navigator; fija el objetivo ("comprometer el controlador de dominio y exfiltrar secret.docx").</a:t>
-            </a:r>
-          </a:p>
-          <a:p>
-            <a:pPr>
-              <a:spcAft>
-                <a:spcPts val="600"/>
-              </a:spcAft>
-            </a:pPr>
-            <a:r>
-              <a:rPr sz="1500">
-                <a:solidFill>
-                  <a:srgbClr val="22282E"/>
-                </a:solidFill>
-              </a:rPr>
-              <a:t>•  Despliega C2. Levanta tu servidor (Sliver/Mythic) en una VM y un redirector Nginx delante; verifica el callback.</a:t>
-            </a:r>
-          </a:p>
-          <a:p>
-            <a:pPr>
-              <a:spcAft>
-                <a:spcPts val="600"/>
-              </a:spcAft>
-            </a:pPr>
-            <a:r>
-              <a:rPr sz="1500">
-                <a:solidFill>
-                  <a:srgbClr val="22282E"/>
-                </a:solidFill>
-              </a:rPr>
-              <a:t>•  Acceso inicial. Genera un payload y simula su entrega (en tu laboratorio, sin víctimas reales); obtén el primer implante.</a:t>
-            </a:r>
-          </a:p>
-          <a:p>
-            <a:pPr>
-              <a:spcAft>
-                <a:spcPts val="600"/>
-              </a:spcAft>
-            </a:pPr>
-            <a:r>
-              <a:rPr sz="1500">
-                <a:solidFill>
-                  <a:srgbClr val="22282E"/>
-                </a:solidFill>
-              </a:rPr>
-              <a:t>•  Descubrimiento. Enumera el host y el dominio (whoami /all, BloodHound) respetando OPSEC.</a:t>
-            </a:r>
-          </a:p>
-          <a:p>
-            <a:pPr>
-              <a:spcAft>
-                <a:spcPts val="600"/>
-              </a:spcAft>
-            </a:pPr>
-            <a:r>
-              <a:rPr sz="1500">
-                <a:solidFill>
-                  <a:srgbClr val="22282E"/>
-                </a:solidFill>
-              </a:rPr>
-              <a:t>•  Escalada y credenciales. Abusa de una debilidad local; extrae credenciales con técnica coherente con el escenario.</a:t>
-            </a:r>
-          </a:p>
-          <a:p>
-            <a:pPr>
-              <a:spcAft>
-                <a:spcPts val="600"/>
-              </a:spcAft>
-            </a:pPr>
-            <a:r>
-              <a:rPr sz="1500">
-                <a:solidFill>
-                  <a:srgbClr val="22282E"/>
-                </a:solidFill>
-              </a:rPr>
-              <a:t>•  Movimiento lateral. Pivota a otros hosts; documenta cada salto y su técnica ATT&amp;CK.</a:t>
-            </a:r>
-          </a:p>
-          <a:p>
-            <a:pPr>
-              <a:spcAft>
-                <a:spcPts val="600"/>
-              </a:spcAft>
-            </a:pPr>
-            <a:r>
-              <a:rPr sz="1500">
-                <a:solidFill>
-                  <a:srgbClr val="22282E"/>
-                </a:solidFill>
-              </a:rPr>
-              <a:t>•  Evasión. Si hay EDR, ajusta el implante (sleep/jitter, ofuscación) y anota qué evadiste y qué te detectó.</a:t>
+              <a:t>•  El alumno domina la clase cuando planifica, ejecuta y comunica una evidencia completa, respeta alcance y puede defender sus decisiones ante una revisión.</a:t>
             </a:r>
           </a:p>
         </p:txBody>
@@ -4614,7 +4960,7 @@
                   <a:srgbClr val="0B3D2E"/>
                 </a:solidFill>
               </a:rPr>
-              <a:t>✍️ Ejercicios</a:t>
+              <a:t>📖 Definiciones y características</a:t>
             </a:r>
           </a:p>
         </p:txBody>
@@ -4652,82 +4998,82 @@
                   <a:srgbClr val="22282E"/>
                 </a:solidFill>
               </a:rPr>
-              <a:t>•  Construye la capa ATT&amp;CK Navigator del adversario emulado.</a:t>
-            </a:r>
-          </a:p>
-          <a:p>
-            <a:pPr>
-              <a:spcAft>
-                <a:spcPts val="600"/>
-              </a:spcAft>
-            </a:pPr>
-            <a:r>
-              <a:rPr sz="1500">
-                <a:solidFill>
-                  <a:srgbClr val="22282E"/>
-                </a:solidFill>
-              </a:rPr>
-              <a:t>•  Diseña el diagrama de tu infraestructura C2 con redirector.</a:t>
-            </a:r>
-          </a:p>
-          <a:p>
-            <a:pPr>
-              <a:spcAft>
-                <a:spcPts val="600"/>
-              </a:spcAft>
-            </a:pPr>
-            <a:r>
-              <a:rPr sz="1500">
-                <a:solidFill>
-                  <a:srgbClr val="22282E"/>
-                </a:solidFill>
-              </a:rPr>
-              <a:t>•  Documenta una cadena acceso inicial → Domain Admin con técnicas ATT&amp;CK por paso.</a:t>
-            </a:r>
-          </a:p>
-          <a:p>
-            <a:pPr>
-              <a:spcAft>
-                <a:spcPts val="600"/>
-              </a:spcAft>
-            </a:pPr>
-            <a:r>
-              <a:rPr sz="1500">
-                <a:solidFill>
-                  <a:srgbClr val="22282E"/>
-                </a:solidFill>
-              </a:rPr>
-              <a:t>•  Compara dos configuraciones de C2 (sleep/jitter) y su impacto en OPSEC.</a:t>
-            </a:r>
-          </a:p>
-          <a:p>
-            <a:pPr>
-              <a:spcAft>
-                <a:spcPts val="600"/>
-              </a:spcAft>
-            </a:pPr>
-            <a:r>
-              <a:rPr sz="1500">
-                <a:solidFill>
-                  <a:srgbClr val="22282E"/>
-                </a:solidFill>
-              </a:rPr>
-              <a:t>•  Enumera 5 técnicas que un EDR debería detectar y por qué.</a:t>
-            </a:r>
-          </a:p>
-          <a:p>
-            <a:pPr>
-              <a:spcAft>
-                <a:spcPts val="600"/>
-              </a:spcAft>
-            </a:pPr>
-            <a:r>
-              <a:rPr sz="1500">
-                <a:solidFill>
-                  <a:srgbClr val="22282E"/>
-                </a:solidFill>
-              </a:rPr>
-              <a:t>•  Escribe la narrativa de ataque para el resumen ejecutivo.</a:t>
+              <a:t>•  Threat emulation: reproducir el TTP de un adversario concreto (p. ej. un grupo APT). Característica: guía qué técnicas usar.</a:t>
+            </a:r>
+          </a:p>
+          <a:p>
+            <a:pPr>
+              <a:spcAft>
+                <a:spcPts val="600"/>
+              </a:spcAft>
+            </a:pPr>
+            <a:r>
+              <a:rPr sz="1500">
+                <a:solidFill>
+                  <a:srgbClr val="22282E"/>
+                </a:solidFill>
+              </a:rPr>
+              <a:t>•  C2 (Command and Control): canal para controlar implantes. Característica: debe ser resiliente y sigiloso.</a:t>
+            </a:r>
+          </a:p>
+          <a:p>
+            <a:pPr>
+              <a:spcAft>
+                <a:spcPts val="600"/>
+              </a:spcAft>
+            </a:pPr>
+            <a:r>
+              <a:rPr sz="1500">
+                <a:solidFill>
+                  <a:srgbClr val="22282E"/>
+                </a:solidFill>
+              </a:rPr>
+              <a:t>•  Redirector: servidor intermedio que oculta el C2 real. Característica: protege la infraestructura del operador.</a:t>
+            </a:r>
+          </a:p>
+          <a:p>
+            <a:pPr>
+              <a:spcAft>
+                <a:spcPts val="600"/>
+              </a:spcAft>
+            </a:pPr>
+            <a:r>
+              <a:rPr sz="1500">
+                <a:solidFill>
+                  <a:srgbClr val="22282E"/>
+                </a:solidFill>
+              </a:rPr>
+              <a:t>•  OPSEC: disciplina para no dejar rastros atribuibles. Característica: cada acción sopesa el riesgo de detección.</a:t>
+            </a:r>
+          </a:p>
+          <a:p>
+            <a:pPr>
+              <a:spcAft>
+                <a:spcPts val="600"/>
+              </a:spcAft>
+            </a:pPr>
+            <a:r>
+              <a:rPr sz="1500">
+                <a:solidFill>
+                  <a:srgbClr val="22282E"/>
+                </a:solidFill>
+              </a:rPr>
+              <a:t>•  Movimiento lateral: pivotar entre hosts con credenciales/técnicas. Característica: base del compromiso de dominio.</a:t>
+            </a:r>
+          </a:p>
+          <a:p>
+            <a:pPr>
+              <a:spcAft>
+                <a:spcPts val="600"/>
+              </a:spcAft>
+            </a:pPr>
+            <a:r>
+              <a:rPr sz="1500">
+                <a:solidFill>
+                  <a:srgbClr val="22282E"/>
+                </a:solidFill>
+              </a:rPr>
+              <a:t>•  Purple teaming: colaboración Red/Blue para mejorar detección. Característica: cierra el ciclo del capstone.</a:t>
             </a:r>
           </a:p>
         </p:txBody>
@@ -4778,7 +5124,7 @@
                   <a:srgbClr val="0B3D2E"/>
                 </a:solidFill>
               </a:rPr>
-              <a:t>📝 Reto verificable</a:t>
+              <a:t>🧰 Herramientas y preparación</a:t>
             </a:r>
           </a:p>
         </p:txBody>
@@ -4816,22 +5162,82 @@
                   <a:srgbClr val="22282E"/>
                 </a:solidFill>
               </a:rPr>
-              <a:t>•  Entrega un informe de operación Red Team (informe-redteam.md) con: escenario y objetivos, diagrama de infraestructura C2, narrativa de ataque paso a paso mapeada a ATT&amp;CK, técnicas de evasión aplicadas y una tabla de recomendaciones de detección para el Blue Team. Adjunta la capa de ATT&amp;CK Navigator.</a:t>
-            </a:r>
-          </a:p>
-          <a:p>
-            <a:pPr>
-              <a:spcAft>
-                <a:spcPts val="600"/>
-              </a:spcAft>
-            </a:pPr>
-            <a:r>
-              <a:rPr sz="1500">
-                <a:solidFill>
-                  <a:srgbClr val="22282E"/>
-                </a:solidFill>
-              </a:rPr>
-              <a:t>•  Criterio de aceptación: la operación alcanza el objetivo definido, cada paso tiene su técnica ATT&amp;CK, la infraestructura incluye al menos un redirector, y el informe entrega recomendaciones de detección accionables (no solo "hackeé X").</a:t>
+              <a:t>•  Laboratorio con AD (GOAD/DetectionLab) y, si tienes, un EDR de prueba.</a:t>
+            </a:r>
+          </a:p>
+          <a:p>
+            <a:pPr>
+              <a:spcAft>
+                <a:spcPts val="600"/>
+              </a:spcAft>
+            </a:pPr>
+            <a:r>
+              <a:rPr sz="1500">
+                <a:solidFill>
+                  <a:srgbClr val="22282E"/>
+                </a:solidFill>
+              </a:rPr>
+              <a:t>•  C2: un framework de laboratorio (p. ej. Sliver, Mythic o Havoc) — usa solo en tu red.</a:t>
+            </a:r>
+          </a:p>
+          <a:p>
+            <a:pPr>
+              <a:spcAft>
+                <a:spcPts val="600"/>
+              </a:spcAft>
+            </a:pPr>
+            <a:r>
+              <a:rPr sz="1500">
+                <a:solidFill>
+                  <a:srgbClr val="22282E"/>
+                </a:solidFill>
+              </a:rPr>
+              <a:t>•  Redirectores: Nginx o socat en una VM intermedia.</a:t>
+            </a:r>
+          </a:p>
+          <a:p>
+            <a:pPr>
+              <a:spcAft>
+                <a:spcPts val="600"/>
+              </a:spcAft>
+            </a:pPr>
+            <a:r>
+              <a:rPr sz="1500">
+                <a:solidFill>
+                  <a:srgbClr val="22282E"/>
+                </a:solidFill>
+              </a:rPr>
+              <a:t>•  Movimiento lateral: impacket, CrackMapExec, Rubeus, Certipy.</a:t>
+            </a:r>
+          </a:p>
+          <a:p>
+            <a:pPr>
+              <a:spcAft>
+                <a:spcPts val="600"/>
+              </a:spcAft>
+            </a:pPr>
+            <a:r>
+              <a:rPr sz="1500">
+                <a:solidFill>
+                  <a:srgbClr val="22282E"/>
+                </a:solidFill>
+              </a:rPr>
+              <a:t>•  Registro: matriz ATT&amp;CK Navigator para marcar técnicas ejecutadas.</a:t>
+            </a:r>
+          </a:p>
+          <a:p>
+            <a:pPr>
+              <a:spcAft>
+                <a:spcPts val="600"/>
+              </a:spcAft>
+            </a:pPr>
+            <a:r>
+              <a:rPr sz="1500">
+                <a:solidFill>
+                  <a:srgbClr val="22282E"/>
+                </a:solidFill>
+              </a:rPr>
+              <a:t>•  Plantilla de informe orientada a detección.</a:t>
             </a:r>
           </a:p>
         </p:txBody>
